--- a/Documentation/Reports and Papers/Dissertation/Figures/60-sns/components/sns_library_overview.pptx
+++ b/Documentation/Reports and Papers/Dissertation/Figures/60-sns/components/sns_library_overview.pptx
@@ -7,7 +7,7 @@
   <p:sldIdLst>
     <p:sldId id="256" r:id="rId7"/>
   </p:sldIdLst>
-  <p:sldSz cx="5832000" cy="2376000" type="screen4x3"/>
+  <p:sldSz cx="5943600" cy="2679700" type="screen4x3"/>
   <p:notesSz cx="6858000" cy="9144000"/>
   <p:defaultTextStyle>
     <a:defPPr>
@@ -3090,26 +3090,24 @@
       <p:grpSpPr/>
       <p:sp>
         <p:nvSpPr>
-          <p:cNvPr id="2" name="Rounded Rectangle 1"/>
+          <p:cNvPr id="2" name="Rectangle 1"/>
           <p:cNvSpPr/>
           <p:nvPr/>
         </p:nvSpPr>
         <p:spPr>
           <a:xfrm>
-            <a:off x="108000" y="468000"/>
-            <a:ext cx="1620000" cy="630000"/>
+            <a:off x="152400" y="152400"/>
+            <a:ext cx="1625600" cy="825500"/>
           </a:xfrm>
-          <a:prstGeom prst="roundRect">
-            <a:avLst>
-              <a:gd name="adj" fmla="val 10000"/>
-            </a:avLst>
+          <a:prstGeom prst="rect">
+            <a:avLst/>
           </a:prstGeom>
           <a:solidFill>
-            <a:srgbClr val="F2F2F2"/>
+            <a:srgbClr val="F1F5F8"/>
           </a:solidFill>
           <a:ln w="12700">
             <a:solidFill>
-              <a:srgbClr val="1F1F1F"/>
+              <a:srgbClr val="243343"/>
             </a:solidFill>
           </a:ln>
         </p:spPr>
@@ -3128,68 +3126,145 @@
           </a:fontRef>
         </p:style>
         <p:txBody>
-          <a:bodyPr rtlCol="0" anchor="ctr" wrap="square" lIns="43200" rIns="43200" tIns="21600" bIns="21600"/>
+          <a:bodyPr rtlCol="0" anchor="ctr"/>
           <a:lstStyle/>
           <a:p>
             <a:pPr algn="ctr"/>
-            <a:r>
-              <a:rPr sz="1000" b="1">
+          </a:p>
+        </p:txBody>
+      </p:sp>
+      <p:sp>
+        <p:nvSpPr>
+          <p:cNvPr id="3" name="TextBox 2"/>
+          <p:cNvSpPr txBox="1"/>
+          <p:nvPr/>
+        </p:nvSpPr>
+        <p:spPr>
+          <a:xfrm>
+            <a:off x="241300" y="309245"/>
+            <a:ext cx="1447800" cy="160654"/>
+          </a:xfrm>
+          <a:prstGeom prst="rect">
+            <a:avLst/>
+          </a:prstGeom>
+          <a:noFill/>
+        </p:spPr>
+        <p:txBody>
+          <a:bodyPr wrap="none" lIns="0" rIns="0" tIns="0" bIns="0">
+            <a:noAutofit/>
+          </a:bodyPr>
+          <a:lstStyle/>
+          <a:p>
+            <a:pPr algn="ctr">
+              <a:lnSpc>
+                <a:spcPts val="1210"/>
+              </a:lnSpc>
+              <a:spcBef>
+                <a:spcPts val="0"/>
+              </a:spcBef>
+              <a:spcAft>
+                <a:spcPts val="0"/>
+              </a:spcAft>
+            </a:pPr>
+            <a:r>
+              <a:rPr sz="1100" b="1" i="0">
                 <a:solidFill>
-                  <a:srgbClr val="1F1F1F"/>
+                  <a:srgbClr val="243343"/>
                 </a:solidFill>
                 <a:latin typeface="Arial"/>
               </a:rPr>
               <a:t>Graded neuron</a:t>
             </a:r>
           </a:p>
-          <a:p>
-            <a:pPr algn="ctr"/>
-            <a:r>
-              <a:rPr sz="1000">
+        </p:txBody>
+      </p:sp>
+      <p:sp>
+        <p:nvSpPr>
+          <p:cNvPr id="4" name="TextBox 3"/>
+          <p:cNvSpPr txBox="1"/>
+          <p:nvPr/>
+        </p:nvSpPr>
+        <p:spPr>
+          <a:xfrm>
+            <a:off x="241300" y="526415"/>
+            <a:ext cx="1447800" cy="324104"/>
+          </a:xfrm>
+          <a:prstGeom prst="rect">
+            <a:avLst/>
+          </a:prstGeom>
+          <a:noFill/>
+        </p:spPr>
+        <p:txBody>
+          <a:bodyPr wrap="none" lIns="0" rIns="0" tIns="0" bIns="0">
+            <a:noAutofit/>
+          </a:bodyPr>
+          <a:lstStyle/>
+          <a:p>
+            <a:pPr algn="ctr">
+              <a:lnSpc>
+                <a:spcPts val="1210"/>
+              </a:lnSpc>
+              <a:spcBef>
+                <a:spcPts val="0"/>
+              </a:spcBef>
+              <a:spcAft>
+                <a:spcPts val="0"/>
+              </a:spcAft>
+            </a:pPr>
+            <a:r>
+              <a:rPr sz="1100" b="0" i="0">
                 <a:solidFill>
-                  <a:srgbClr val="1F1F1F"/>
+                  <a:srgbClr val="243343"/>
                 </a:solidFill>
                 <a:latin typeface="Arial"/>
               </a:rPr>
-              <a:t>membrane voltage is</a:t>
-            </a:r>
-          </a:p>
-          <a:p>
-            <a:pPr algn="ctr"/>
-            <a:r>
-              <a:rPr sz="1000">
+              <a:t>Membrane voltage</a:t>
+            </a:r>
+          </a:p>
+          <a:p>
+            <a:pPr algn="ctr">
+              <a:lnSpc>
+                <a:spcPts val="1210"/>
+              </a:lnSpc>
+              <a:spcBef>
+                <a:spcPts val="0"/>
+              </a:spcBef>
+              <a:spcAft>
+                <a:spcPts val="0"/>
+              </a:spcAft>
+            </a:pPr>
+            <a:r>
+              <a:rPr sz="1100" b="0" i="0">
                 <a:solidFill>
-                  <a:srgbClr val="1F1F1F"/>
+                  <a:srgbClr val="243343"/>
                 </a:solidFill>
                 <a:latin typeface="Arial"/>
               </a:rPr>
-              <a:t>the output</a:t>
-            </a:r>
-          </a:p>
-        </p:txBody>
-      </p:sp>
-      <p:sp>
-        <p:nvSpPr>
-          <p:cNvPr id="3" name="Rounded Rectangle 2"/>
+              <a:t>is the output</a:t>
+            </a:r>
+          </a:p>
+        </p:txBody>
+      </p:sp>
+      <p:sp>
+        <p:nvSpPr>
+          <p:cNvPr id="5" name="Rectangle 4"/>
           <p:cNvSpPr/>
           <p:nvPr/>
         </p:nvSpPr>
         <p:spPr>
           <a:xfrm>
-            <a:off x="2106000" y="468000"/>
-            <a:ext cx="1620000" cy="630000"/>
+            <a:off x="2159000" y="152400"/>
+            <a:ext cx="1625600" cy="825500"/>
           </a:xfrm>
-          <a:prstGeom prst="roundRect">
-            <a:avLst>
-              <a:gd name="adj" fmla="val 10000"/>
-            </a:avLst>
+          <a:prstGeom prst="rect">
+            <a:avLst/>
           </a:prstGeom>
           <a:solidFill>
-            <a:srgbClr val="F2F2F2"/>
+            <a:srgbClr val="F1F5F8"/>
           </a:solidFill>
           <a:ln w="12700">
             <a:solidFill>
-              <a:srgbClr val="1F1F1F"/>
+              <a:srgbClr val="243343"/>
             </a:solidFill>
           </a:ln>
         </p:spPr>
@@ -3208,68 +3283,145 @@
           </a:fontRef>
         </p:style>
         <p:txBody>
-          <a:bodyPr rtlCol="0" anchor="ctr" wrap="square" lIns="43200" rIns="43200" tIns="21600" bIns="21600"/>
+          <a:bodyPr rtlCol="0" anchor="ctr"/>
           <a:lstStyle/>
           <a:p>
             <a:pPr algn="ctr"/>
-            <a:r>
-              <a:rPr sz="1000" b="1">
+          </a:p>
+        </p:txBody>
+      </p:sp>
+      <p:sp>
+        <p:nvSpPr>
+          <p:cNvPr id="6" name="TextBox 5"/>
+          <p:cNvSpPr txBox="1"/>
+          <p:nvPr/>
+        </p:nvSpPr>
+        <p:spPr>
+          <a:xfrm>
+            <a:off x="2247900" y="309245"/>
+            <a:ext cx="1447800" cy="160654"/>
+          </a:xfrm>
+          <a:prstGeom prst="rect">
+            <a:avLst/>
+          </a:prstGeom>
+          <a:noFill/>
+        </p:spPr>
+        <p:txBody>
+          <a:bodyPr wrap="none" lIns="0" rIns="0" tIns="0" bIns="0">
+            <a:noAutofit/>
+          </a:bodyPr>
+          <a:lstStyle/>
+          <a:p>
+            <a:pPr algn="ctr">
+              <a:lnSpc>
+                <a:spcPts val="1210"/>
+              </a:lnSpc>
+              <a:spcBef>
+                <a:spcPts val="0"/>
+              </a:spcBef>
+              <a:spcAft>
+                <a:spcPts val="0"/>
+              </a:spcAft>
+            </a:pPr>
+            <a:r>
+              <a:rPr sz="1100" b="1" i="0">
                 <a:solidFill>
-                  <a:srgbClr val="1F1F1F"/>
+                  <a:srgbClr val="243343"/>
                 </a:solidFill>
                 <a:latin typeface="Arial"/>
               </a:rPr>
               <a:t>Graded synapse</a:t>
             </a:r>
           </a:p>
-          <a:p>
-            <a:pPr algn="ctr"/>
-            <a:r>
-              <a:rPr sz="1000">
+        </p:txBody>
+      </p:sp>
+      <p:sp>
+        <p:nvSpPr>
+          <p:cNvPr id="7" name="TextBox 6"/>
+          <p:cNvSpPr txBox="1"/>
+          <p:nvPr/>
+        </p:nvSpPr>
+        <p:spPr>
+          <a:xfrm>
+            <a:off x="2247900" y="526415"/>
+            <a:ext cx="1447800" cy="324104"/>
+          </a:xfrm>
+          <a:prstGeom prst="rect">
+            <a:avLst/>
+          </a:prstGeom>
+          <a:noFill/>
+        </p:spPr>
+        <p:txBody>
+          <a:bodyPr wrap="none" lIns="0" rIns="0" tIns="0" bIns="0">
+            <a:noAutofit/>
+          </a:bodyPr>
+          <a:lstStyle/>
+          <a:p>
+            <a:pPr algn="ctr">
+              <a:lnSpc>
+                <a:spcPts val="1210"/>
+              </a:lnSpc>
+              <a:spcBef>
+                <a:spcPts val="0"/>
+              </a:spcBef>
+              <a:spcAft>
+                <a:spcPts val="0"/>
+              </a:spcAft>
+            </a:pPr>
+            <a:r>
+              <a:rPr sz="1100" b="0" i="0">
                 <a:solidFill>
-                  <a:srgbClr val="1F1F1F"/>
+                  <a:srgbClr val="243343"/>
                 </a:solidFill>
                 <a:latin typeface="Arial"/>
               </a:rPr>
-              <a:t>sign from the</a:t>
-            </a:r>
-          </a:p>
-          <a:p>
-            <a:pPr algn="ctr"/>
-            <a:r>
-              <a:rPr sz="1000">
+              <a:t>Conductance coupling;</a:t>
+            </a:r>
+          </a:p>
+          <a:p>
+            <a:pPr algn="ctr">
+              <a:lnSpc>
+                <a:spcPts val="1210"/>
+              </a:lnSpc>
+              <a:spcBef>
+                <a:spcPts val="0"/>
+              </a:spcBef>
+              <a:spcAft>
+                <a:spcPts val="0"/>
+              </a:spcAft>
+            </a:pPr>
+            <a:r>
+              <a:rPr sz="1100" b="0" i="0">
                 <a:solidFill>
-                  <a:srgbClr val="1F1F1F"/>
+                  <a:srgbClr val="243343"/>
                 </a:solidFill>
                 <a:latin typeface="Arial"/>
               </a:rPr>
-              <a:t>connection</a:t>
-            </a:r>
-          </a:p>
-        </p:txBody>
-      </p:sp>
-      <p:sp>
-        <p:nvSpPr>
-          <p:cNvPr id="4" name="Rounded Rectangle 3"/>
+              <a:t>excitation or inhibition</a:t>
+            </a:r>
+          </a:p>
+        </p:txBody>
+      </p:sp>
+      <p:sp>
+        <p:nvSpPr>
+          <p:cNvPr id="8" name="Rectangle 7"/>
           <p:cNvSpPr/>
           <p:nvPr/>
         </p:nvSpPr>
         <p:spPr>
           <a:xfrm>
-            <a:off x="4104000" y="468000"/>
-            <a:ext cx="1620000" cy="630000"/>
+            <a:off x="4165600" y="152400"/>
+            <a:ext cx="1625600" cy="825500"/>
           </a:xfrm>
-          <a:prstGeom prst="roundRect">
-            <a:avLst>
-              <a:gd name="adj" fmla="val 10000"/>
-            </a:avLst>
+          <a:prstGeom prst="rect">
+            <a:avLst/>
           </a:prstGeom>
           <a:solidFill>
-            <a:srgbClr val="F2F2F2"/>
+            <a:srgbClr val="F1F5F8"/>
           </a:solidFill>
           <a:ln w="12700">
             <a:solidFill>
-              <a:srgbClr val="1F1F1F"/>
+              <a:srgbClr val="243343"/>
             </a:solidFill>
           </a:ln>
         </p:spPr>
@@ -3288,68 +3440,145 @@
           </a:fontRef>
         </p:style>
         <p:txBody>
-          <a:bodyPr rtlCol="0" anchor="ctr" wrap="square" lIns="43200" rIns="43200" tIns="21600" bIns="21600"/>
+          <a:bodyPr rtlCol="0" anchor="ctr"/>
           <a:lstStyle/>
           <a:p>
             <a:pPr algn="ctr"/>
-            <a:r>
-              <a:rPr sz="1000" b="1">
+          </a:p>
+        </p:txBody>
+      </p:sp>
+      <p:sp>
+        <p:nvSpPr>
+          <p:cNvPr id="9" name="TextBox 8"/>
+          <p:cNvSpPr txBox="1"/>
+          <p:nvPr/>
+        </p:nvSpPr>
+        <p:spPr>
+          <a:xfrm>
+            <a:off x="4254500" y="309245"/>
+            <a:ext cx="1447800" cy="160654"/>
+          </a:xfrm>
+          <a:prstGeom prst="rect">
+            <a:avLst/>
+          </a:prstGeom>
+          <a:noFill/>
+        </p:spPr>
+        <p:txBody>
+          <a:bodyPr wrap="none" lIns="0" rIns="0" tIns="0" bIns="0">
+            <a:noAutofit/>
+          </a:bodyPr>
+          <a:lstStyle/>
+          <a:p>
+            <a:pPr algn="ctr">
+              <a:lnSpc>
+                <a:spcPts val="1210"/>
+              </a:lnSpc>
+              <a:spcBef>
+                <a:spcPts val="0"/>
+              </a:spcBef>
+              <a:spcAft>
+                <a:spcPts val="0"/>
+              </a:spcAft>
+            </a:pPr>
+            <a:r>
+              <a:rPr sz="1100" b="1" i="0">
                 <a:solidFill>
-                  <a:srgbClr val="1F1F1F"/>
+                  <a:srgbClr val="243343"/>
                 </a:solidFill>
                 <a:latin typeface="Arial"/>
               </a:rPr>
               <a:t>Spiking neuron</a:t>
             </a:r>
           </a:p>
-          <a:p>
-            <a:pPr algn="ctr"/>
-            <a:r>
-              <a:rPr sz="1000">
+        </p:txBody>
+      </p:sp>
+      <p:sp>
+        <p:nvSpPr>
+          <p:cNvPr id="10" name="TextBox 9"/>
+          <p:cNvSpPr txBox="1"/>
+          <p:nvPr/>
+        </p:nvSpPr>
+        <p:spPr>
+          <a:xfrm>
+            <a:off x="4254500" y="526415"/>
+            <a:ext cx="1447800" cy="324104"/>
+          </a:xfrm>
+          <a:prstGeom prst="rect">
+            <a:avLst/>
+          </a:prstGeom>
+          <a:noFill/>
+        </p:spPr>
+        <p:txBody>
+          <a:bodyPr wrap="none" lIns="0" rIns="0" tIns="0" bIns="0">
+            <a:noAutofit/>
+          </a:bodyPr>
+          <a:lstStyle/>
+          <a:p>
+            <a:pPr algn="ctr">
+              <a:lnSpc>
+                <a:spcPts val="1210"/>
+              </a:lnSpc>
+              <a:spcBef>
+                <a:spcPts val="0"/>
+              </a:spcBef>
+              <a:spcAft>
+                <a:spcPts val="0"/>
+              </a:spcAft>
+            </a:pPr>
+            <a:r>
+              <a:rPr sz="1100" b="0" i="0">
                 <a:solidFill>
-                  <a:srgbClr val="1F1F1F"/>
+                  <a:srgbClr val="243343"/>
                 </a:solidFill>
                 <a:latin typeface="Arial"/>
               </a:rPr>
-              <a:t>leaky integrate-</a:t>
-            </a:r>
-          </a:p>
-          <a:p>
-            <a:pPr algn="ctr"/>
-            <a:r>
-              <a:rPr sz="1000">
+              <a:t>Leaky integrate-</a:t>
+            </a:r>
+          </a:p>
+          <a:p>
+            <a:pPr algn="ctr">
+              <a:lnSpc>
+                <a:spcPts val="1210"/>
+              </a:lnSpc>
+              <a:spcBef>
+                <a:spcPts val="0"/>
+              </a:spcBef>
+              <a:spcAft>
+                <a:spcPts val="0"/>
+              </a:spcAft>
+            </a:pPr>
+            <a:r>
+              <a:rPr sz="1100" b="0" i="0">
                 <a:solidFill>
-                  <a:srgbClr val="1F1F1F"/>
+                  <a:srgbClr val="243343"/>
                 </a:solidFill>
                 <a:latin typeface="Arial"/>
               </a:rPr>
-              <a:t>and-fire</a:t>
-            </a:r>
-          </a:p>
-        </p:txBody>
-      </p:sp>
-      <p:sp>
-        <p:nvSpPr>
-          <p:cNvPr id="5" name="Rounded Rectangle 4"/>
+              <a:t>and-fire model</a:t>
+            </a:r>
+          </a:p>
+        </p:txBody>
+      </p:sp>
+      <p:sp>
+        <p:nvSpPr>
+          <p:cNvPr id="11" name="Rectangle 10"/>
           <p:cNvSpPr/>
           <p:nvPr/>
         </p:nvSpPr>
         <p:spPr>
           <a:xfrm>
-            <a:off x="108000" y="1404000"/>
-            <a:ext cx="1620000" cy="630000"/>
+            <a:off x="152400" y="1231900"/>
+            <a:ext cx="1625600" cy="825500"/>
           </a:xfrm>
-          <a:prstGeom prst="roundRect">
-            <a:avLst>
-              <a:gd name="adj" fmla="val 10000"/>
-            </a:avLst>
+          <a:prstGeom prst="rect">
+            <a:avLst/>
           </a:prstGeom>
           <a:solidFill>
-            <a:srgbClr val="F2F2F2"/>
+            <a:srgbClr val="F1F5F8"/>
           </a:solidFill>
           <a:ln w="12700">
             <a:solidFill>
-              <a:srgbClr val="1F1F1F"/>
+              <a:srgbClr val="243343"/>
             </a:solidFill>
           </a:ln>
         </p:spPr>
@@ -3368,68 +3597,145 @@
           </a:fontRef>
         </p:style>
         <p:txBody>
-          <a:bodyPr rtlCol="0" anchor="ctr" wrap="square" lIns="43200" rIns="43200" tIns="21600" bIns="21600"/>
+          <a:bodyPr rtlCol="0" anchor="ctr"/>
           <a:lstStyle/>
           <a:p>
             <a:pPr algn="ctr"/>
-            <a:r>
-              <a:rPr sz="1000" b="1">
+          </a:p>
+        </p:txBody>
+      </p:sp>
+      <p:sp>
+        <p:nvSpPr>
+          <p:cNvPr id="12" name="TextBox 11"/>
+          <p:cNvSpPr txBox="1"/>
+          <p:nvPr/>
+        </p:nvSpPr>
+        <p:spPr>
+          <a:xfrm>
+            <a:off x="241300" y="1388745"/>
+            <a:ext cx="1447800" cy="160654"/>
+          </a:xfrm>
+          <a:prstGeom prst="rect">
+            <a:avLst/>
+          </a:prstGeom>
+          <a:noFill/>
+        </p:spPr>
+        <p:txBody>
+          <a:bodyPr wrap="none" lIns="0" rIns="0" tIns="0" bIns="0">
+            <a:noAutofit/>
+          </a:bodyPr>
+          <a:lstStyle/>
+          <a:p>
+            <a:pPr algn="ctr">
+              <a:lnSpc>
+                <a:spcPts val="1210"/>
+              </a:lnSpc>
+              <a:spcBef>
+                <a:spcPts val="0"/>
+              </a:spcBef>
+              <a:spcAft>
+                <a:spcPts val="0"/>
+              </a:spcAft>
+            </a:pPr>
+            <a:r>
+              <a:rPr sz="1100" b="1" i="0">
                 <a:solidFill>
-                  <a:srgbClr val="1F1F1F"/>
+                  <a:srgbClr val="243343"/>
                 </a:solidFill>
                 <a:latin typeface="Arial"/>
               </a:rPr>
               <a:t>Ia encoder</a:t>
             </a:r>
           </a:p>
-          <a:p>
-            <a:pPr algn="ctr"/>
-            <a:r>
-              <a:rPr sz="1000">
+        </p:txBody>
+      </p:sp>
+      <p:sp>
+        <p:nvSpPr>
+          <p:cNvPr id="13" name="TextBox 12"/>
+          <p:cNvSpPr txBox="1"/>
+          <p:nvPr/>
+        </p:nvSpPr>
+        <p:spPr>
+          <a:xfrm>
+            <a:off x="241300" y="1605914"/>
+            <a:ext cx="1447800" cy="324104"/>
+          </a:xfrm>
+          <a:prstGeom prst="rect">
+            <a:avLst/>
+          </a:prstGeom>
+          <a:noFill/>
+        </p:spPr>
+        <p:txBody>
+          <a:bodyPr wrap="none" lIns="0" rIns="0" tIns="0" bIns="0">
+            <a:noAutofit/>
+          </a:bodyPr>
+          <a:lstStyle/>
+          <a:p>
+            <a:pPr algn="ctr">
+              <a:lnSpc>
+                <a:spcPts val="1210"/>
+              </a:lnSpc>
+              <a:spcBef>
+                <a:spcPts val="0"/>
+              </a:spcBef>
+              <a:spcAft>
+                <a:spcPts val="0"/>
+              </a:spcAft>
+            </a:pPr>
+            <a:r>
+              <a:rPr sz="1100" b="0" i="0">
                 <a:solidFill>
-                  <a:srgbClr val="1F1F1F"/>
+                  <a:srgbClr val="243343"/>
                 </a:solidFill>
                 <a:latin typeface="Arial"/>
               </a:rPr>
-              <a:t>length and</a:t>
-            </a:r>
-          </a:p>
-          <a:p>
-            <a:pPr algn="ctr"/>
-            <a:r>
-              <a:rPr sz="1000">
+              <a:t>Muscle length</a:t>
+            </a:r>
+          </a:p>
+          <a:p>
+            <a:pPr algn="ctr">
+              <a:lnSpc>
+                <a:spcPts val="1210"/>
+              </a:lnSpc>
+              <a:spcBef>
+                <a:spcPts val="0"/>
+              </a:spcBef>
+              <a:spcAft>
+                <a:spcPts val="0"/>
+              </a:spcAft>
+            </a:pPr>
+            <a:r>
+              <a:rPr sz="1100" b="0" i="0">
                 <a:solidFill>
-                  <a:srgbClr val="1F1F1F"/>
+                  <a:srgbClr val="243343"/>
                 </a:solidFill>
                 <a:latin typeface="Arial"/>
               </a:rPr>
-              <a:t>velocity</a:t>
-            </a:r>
-          </a:p>
-        </p:txBody>
-      </p:sp>
-      <p:sp>
-        <p:nvSpPr>
-          <p:cNvPr id="6" name="Rounded Rectangle 5"/>
+              <a:t>and velocity</a:t>
+            </a:r>
+          </a:p>
+        </p:txBody>
+      </p:sp>
+      <p:sp>
+        <p:nvSpPr>
+          <p:cNvPr id="14" name="Rectangle 13"/>
           <p:cNvSpPr/>
           <p:nvPr/>
         </p:nvSpPr>
         <p:spPr>
           <a:xfrm>
-            <a:off x="2106000" y="1404000"/>
-            <a:ext cx="1620000" cy="630000"/>
+            <a:off x="2159000" y="1231900"/>
+            <a:ext cx="1625600" cy="825500"/>
           </a:xfrm>
-          <a:prstGeom prst="roundRect">
-            <a:avLst>
-              <a:gd name="adj" fmla="val 10000"/>
-            </a:avLst>
+          <a:prstGeom prst="rect">
+            <a:avLst/>
           </a:prstGeom>
           <a:solidFill>
-            <a:srgbClr val="F2F2F2"/>
+            <a:srgbClr val="F1F5F8"/>
           </a:solidFill>
           <a:ln w="12700">
             <a:solidFill>
-              <a:srgbClr val="1F1F1F"/>
+              <a:srgbClr val="243343"/>
             </a:solidFill>
           </a:ln>
         </p:spPr>
@@ -3448,56 +3754,123 @@
           </a:fontRef>
         </p:style>
         <p:txBody>
-          <a:bodyPr rtlCol="0" anchor="ctr" wrap="square" lIns="43200" rIns="43200" tIns="21600" bIns="21600"/>
+          <a:bodyPr rtlCol="0" anchor="ctr"/>
           <a:lstStyle/>
           <a:p>
             <a:pPr algn="ctr"/>
-            <a:r>
-              <a:rPr sz="1000" b="1">
+          </a:p>
+        </p:txBody>
+      </p:sp>
+      <p:sp>
+        <p:nvSpPr>
+          <p:cNvPr id="15" name="TextBox 14"/>
+          <p:cNvSpPr txBox="1"/>
+          <p:nvPr/>
+        </p:nvSpPr>
+        <p:spPr>
+          <a:xfrm>
+            <a:off x="2247900" y="1465580"/>
+            <a:ext cx="1447800" cy="160654"/>
+          </a:xfrm>
+          <a:prstGeom prst="rect">
+            <a:avLst/>
+          </a:prstGeom>
+          <a:noFill/>
+        </p:spPr>
+        <p:txBody>
+          <a:bodyPr wrap="none" lIns="0" rIns="0" tIns="0" bIns="0">
+            <a:noAutofit/>
+          </a:bodyPr>
+          <a:lstStyle/>
+          <a:p>
+            <a:pPr algn="ctr">
+              <a:lnSpc>
+                <a:spcPts val="1210"/>
+              </a:lnSpc>
+              <a:spcBef>
+                <a:spcPts val="0"/>
+              </a:spcBef>
+              <a:spcAft>
+                <a:spcPts val="0"/>
+              </a:spcAft>
+            </a:pPr>
+            <a:r>
+              <a:rPr sz="1100" b="1" i="0">
                 <a:solidFill>
-                  <a:srgbClr val="1F1F1F"/>
+                  <a:srgbClr val="243343"/>
                 </a:solidFill>
                 <a:latin typeface="Arial"/>
               </a:rPr>
               <a:t>Ib encoder</a:t>
             </a:r>
           </a:p>
-          <a:p>
-            <a:pPr algn="ctr"/>
-            <a:r>
-              <a:rPr sz="1000">
+        </p:txBody>
+      </p:sp>
+      <p:sp>
+        <p:nvSpPr>
+          <p:cNvPr id="16" name="TextBox 15"/>
+          <p:cNvSpPr txBox="1"/>
+          <p:nvPr/>
+        </p:nvSpPr>
+        <p:spPr>
+          <a:xfrm>
+            <a:off x="2247900" y="1682750"/>
+            <a:ext cx="1447800" cy="162052"/>
+          </a:xfrm>
+          <a:prstGeom prst="rect">
+            <a:avLst/>
+          </a:prstGeom>
+          <a:noFill/>
+        </p:spPr>
+        <p:txBody>
+          <a:bodyPr wrap="none" lIns="0" rIns="0" tIns="0" bIns="0">
+            <a:noAutofit/>
+          </a:bodyPr>
+          <a:lstStyle/>
+          <a:p>
+            <a:pPr algn="ctr">
+              <a:lnSpc>
+                <a:spcPts val="1210"/>
+              </a:lnSpc>
+              <a:spcBef>
+                <a:spcPts val="0"/>
+              </a:spcBef>
+              <a:spcAft>
+                <a:spcPts val="0"/>
+              </a:spcAft>
+            </a:pPr>
+            <a:r>
+              <a:rPr sz="1100" b="0" i="0">
                 <a:solidFill>
-                  <a:srgbClr val="1F1F1F"/>
+                  <a:srgbClr val="243343"/>
                 </a:solidFill>
                 <a:latin typeface="Arial"/>
               </a:rPr>
-              <a:t>muscle force</a:t>
-            </a:r>
-          </a:p>
-        </p:txBody>
-      </p:sp>
-      <p:sp>
-        <p:nvSpPr>
-          <p:cNvPr id="7" name="Rounded Rectangle 6"/>
+              <a:t>Muscle force</a:t>
+            </a:r>
+          </a:p>
+        </p:txBody>
+      </p:sp>
+      <p:sp>
+        <p:nvSpPr>
+          <p:cNvPr id="17" name="Rectangle 16"/>
           <p:cNvSpPr/>
           <p:nvPr/>
         </p:nvSpPr>
         <p:spPr>
           <a:xfrm>
-            <a:off x="4104000" y="1404000"/>
-            <a:ext cx="1620000" cy="630000"/>
+            <a:off x="4165600" y="1231900"/>
+            <a:ext cx="1625600" cy="825500"/>
           </a:xfrm>
-          <a:prstGeom prst="roundRect">
-            <a:avLst>
-              <a:gd name="adj" fmla="val 10000"/>
-            </a:avLst>
+          <a:prstGeom prst="rect">
+            <a:avLst/>
           </a:prstGeom>
           <a:solidFill>
-            <a:srgbClr val="F2F2F2"/>
+            <a:srgbClr val="F1F5F8"/>
           </a:solidFill>
           <a:ln w="12700">
             <a:solidFill>
-              <a:srgbClr val="1F1F1F"/>
+              <a:srgbClr val="243343"/>
             </a:solidFill>
           </a:ln>
         </p:spPr>
@@ -3516,110 +3889,201 @@
           </a:fontRef>
         </p:style>
         <p:txBody>
-          <a:bodyPr rtlCol="0" anchor="ctr" wrap="square" lIns="43200" rIns="43200" tIns="21600" bIns="21600"/>
+          <a:bodyPr rtlCol="0" anchor="ctr"/>
           <a:lstStyle/>
           <a:p>
             <a:pPr algn="ctr"/>
-            <a:r>
-              <a:rPr sz="1000" b="1">
+          </a:p>
+        </p:txBody>
+      </p:sp>
+      <p:sp>
+        <p:nvSpPr>
+          <p:cNvPr id="18" name="TextBox 17"/>
+          <p:cNvSpPr txBox="1"/>
+          <p:nvPr/>
+        </p:nvSpPr>
+        <p:spPr>
+          <a:xfrm>
+            <a:off x="4254500" y="1388745"/>
+            <a:ext cx="1447800" cy="160654"/>
+          </a:xfrm>
+          <a:prstGeom prst="rect">
+            <a:avLst/>
+          </a:prstGeom>
+          <a:noFill/>
+        </p:spPr>
+        <p:txBody>
+          <a:bodyPr wrap="none" lIns="0" rIns="0" tIns="0" bIns="0">
+            <a:noAutofit/>
+          </a:bodyPr>
+          <a:lstStyle/>
+          <a:p>
+            <a:pPr algn="ctr">
+              <a:lnSpc>
+                <a:spcPts val="1210"/>
+              </a:lnSpc>
+              <a:spcBef>
+                <a:spcPts val="0"/>
+              </a:spcBef>
+              <a:spcAft>
+                <a:spcPts val="0"/>
+              </a:spcAft>
+            </a:pPr>
+            <a:r>
+              <a:rPr sz="1100" b="1" i="0">
                 <a:solidFill>
-                  <a:srgbClr val="1F1F1F"/>
+                  <a:srgbClr val="243343"/>
                 </a:solidFill>
                 <a:latin typeface="Arial"/>
               </a:rPr>
-              <a:t>Activation</a:t>
-            </a:r>
-          </a:p>
-          <a:p>
-            <a:pPr algn="ctr"/>
-            <a:r>
-              <a:rPr sz="1000">
+              <a:t>Activation dynamics</a:t>
+            </a:r>
+          </a:p>
+        </p:txBody>
+      </p:sp>
+      <p:sp>
+        <p:nvSpPr>
+          <p:cNvPr id="19" name="TextBox 18"/>
+          <p:cNvSpPr txBox="1"/>
+          <p:nvPr/>
+        </p:nvSpPr>
+        <p:spPr>
+          <a:xfrm>
+            <a:off x="4254500" y="1605914"/>
+            <a:ext cx="1447800" cy="324104"/>
+          </a:xfrm>
+          <a:prstGeom prst="rect">
+            <a:avLst/>
+          </a:prstGeom>
+          <a:noFill/>
+        </p:spPr>
+        <p:txBody>
+          <a:bodyPr wrap="none" lIns="0" rIns="0" tIns="0" bIns="0">
+            <a:noAutofit/>
+          </a:bodyPr>
+          <a:lstStyle/>
+          <a:p>
+            <a:pPr algn="ctr">
+              <a:lnSpc>
+                <a:spcPts val="1210"/>
+              </a:lnSpc>
+              <a:spcBef>
+                <a:spcPts val="0"/>
+              </a:spcBef>
+              <a:spcAft>
+                <a:spcPts val="0"/>
+              </a:spcAft>
+            </a:pPr>
+            <a:r>
+              <a:rPr sz="1100" b="0" i="0">
                 <a:solidFill>
-                  <a:srgbClr val="1F1F1F"/>
+                  <a:srgbClr val="243343"/>
                 </a:solidFill>
                 <a:latin typeface="Arial"/>
               </a:rPr>
-              <a:t>dynamics</a:t>
-            </a:r>
-          </a:p>
-          <a:p>
-            <a:pPr algn="ctr"/>
-            <a:r>
-              <a:rPr sz="1000">
+              <a:t>Continuous muscle</a:t>
+            </a:r>
+          </a:p>
+          <a:p>
+            <a:pPr algn="ctr">
+              <a:lnSpc>
+                <a:spcPts val="1210"/>
+              </a:lnSpc>
+              <a:spcBef>
+                <a:spcPts val="0"/>
+              </a:spcBef>
+              <a:spcAft>
+                <a:spcPts val="0"/>
+              </a:spcAft>
+            </a:pPr>
+            <a:r>
+              <a:rPr sz="1100" b="0" i="0">
                 <a:solidFill>
-                  <a:srgbClr val="1F1F1F"/>
+                  <a:srgbClr val="243343"/>
                 </a:solidFill>
                 <a:latin typeface="Arial"/>
               </a:rPr>
-              <a:t>muscle activation</a:t>
-            </a:r>
-          </a:p>
-          <a:p>
-            <a:pPr algn="ctr"/>
-            <a:r>
-              <a:rPr sz="1000">
-                <a:solidFill>
-                  <a:srgbClr val="1F1F1F"/>
-                </a:solidFill>
-                <a:latin typeface="Arial"/>
-              </a:rPr>
-              <a:t>filter</a:t>
-            </a:r>
-          </a:p>
-        </p:txBody>
-      </p:sp>
-      <p:sp>
-        <p:nvSpPr>
-          <p:cNvPr id="8" name="Rounded Rectangle 7"/>
-          <p:cNvSpPr/>
+              <a:t>activation filter</a:t>
+            </a:r>
+          </a:p>
+        </p:txBody>
+      </p:sp>
+      <p:cxnSp>
+        <p:nvCxnSpPr>
+          <p:cNvPr id="20" name="Connector 19"/>
+          <p:cNvCxnSpPr/>
           <p:nvPr/>
-        </p:nvSpPr>
+        </p:nvCxnSpPr>
         <p:spPr>
           <a:xfrm>
-            <a:off x="108000" y="1998000"/>
-            <a:ext cx="5616000" cy="342000"/>
+            <a:off x="152400" y="2260600"/>
+            <a:ext cx="5638800" cy="0"/>
           </a:xfrm>
-          <a:prstGeom prst="roundRect">
-            <a:avLst>
-              <a:gd name="adj" fmla="val 10000"/>
-            </a:avLst>
+          <a:prstGeom prst="line">
+            <a:avLst/>
           </a:prstGeom>
-          <a:solidFill>
-            <a:srgbClr val="F2F2F2"/>
-          </a:solidFill>
           <a:ln w="12700">
             <a:solidFill>
-              <a:srgbClr val="1F1F1F"/>
+              <a:srgbClr val="6C7680"/>
             </a:solidFill>
           </a:ln>
         </p:spPr>
         <p:style>
-          <a:lnRef idx="1">
+          <a:lnRef idx="2">
             <a:schemeClr val="accent1"/>
           </a:lnRef>
-          <a:fillRef idx="3">
+          <a:fillRef idx="0">
             <a:schemeClr val="accent1"/>
           </a:fillRef>
-          <a:effectRef idx="2">
+          <a:effectRef idx="1">
             <a:schemeClr val="accent1"/>
           </a:effectRef>
           <a:fontRef idx="minor">
-            <a:schemeClr val="lt1"/>
+            <a:schemeClr val="tx1"/>
           </a:fontRef>
         </p:style>
-        <p:txBody>
-          <a:bodyPr rtlCol="0" anchor="ctr" wrap="square" lIns="43200" rIns="43200" tIns="21600" bIns="21600"/>
-          <a:lstStyle/>
-          <a:p>
-            <a:pPr algn="ctr"/>
-            <a:r>
-              <a:rPr sz="1000">
+      </p:cxnSp>
+      <p:sp>
+        <p:nvSpPr>
+          <p:cNvPr id="21" name="TextBox 20"/>
+          <p:cNvSpPr txBox="1"/>
+          <p:nvPr/>
+        </p:nvSpPr>
+        <p:spPr>
+          <a:xfrm>
+            <a:off x="177800" y="2374900"/>
+            <a:ext cx="5588000" cy="228600"/>
+          </a:xfrm>
+          <a:prstGeom prst="rect">
+            <a:avLst/>
+          </a:prstGeom>
+          <a:noFill/>
+        </p:spPr>
+        <p:txBody>
+          <a:bodyPr wrap="none" lIns="0" rIns="0" tIns="0" bIns="0">
+            <a:noAutofit/>
+          </a:bodyPr>
+          <a:lstStyle/>
+          <a:p>
+            <a:pPr algn="ctr">
+              <a:lnSpc>
+                <a:spcPts val="1188"/>
+              </a:lnSpc>
+              <a:spcBef>
+                <a:spcPts val="0"/>
+              </a:spcBef>
+              <a:spcAft>
+                <a:spcPts val="0"/>
+              </a:spcAft>
+            </a:pPr>
+            <a:r>
+              <a:rPr sz="1080" b="0" i="0">
                 <a:solidFill>
-                  <a:srgbClr val="1F1F1F"/>
+                  <a:srgbClr val="243343"/>
                 </a:solidFill>
                 <a:latin typeface="Arial"/>
               </a:rPr>
-              <a:t>plus the synapse-sum junction, three diameter-specific BPA force blocks, and the biological muscle block</a:t>
+              <a:t>Also: synapse sum, diameter-specific BPA force blocks, and biological muscle.</a:t>
             </a:r>
           </a:p>
         </p:txBody>
